--- a/Presentation/Observability_Strategy_Presentation.pptx
+++ b/Presentation/Observability_Strategy_Presentation.pptx
@@ -135,6 +135,66 @@
     </p:ext>
   </p:extLst>
 </p:presentation>
+</file>
+
+<file path=ppt/commentAuthors.xml><?xml version="1.0" encoding="utf-8"?>
+<p:cmAuthorLst xmlns:a="http://schemas.openxmlformats.org/drawingml/2006/main" xmlns:r="http://schemas.openxmlformats.org/officeDocument/2006/relationships" xmlns:p="http://schemas.openxmlformats.org/presentationml/2006/main">
+  <p:cmAuthor id="1" name="Simon Armstrong" initials="SA" lastIdx="4" clrIdx="0">
+    <p:extLst>
+      <p:ext uri="{19B8F6BF-5375-455C-9EA6-DF929625EA0E}">
+        <p15:presenceInfo xmlns:p15="http://schemas.microsoft.com/office/powerpoint/2012/main" userId="S::simon.armstrong@xceedance.com::25bf7e7e-18dd-450f-aea5-90996c2a05c8" providerId="AD"/>
+      </p:ext>
+    </p:extLst>
+  </p:cmAuthor>
+</p:cmAuthorLst>
+</file>
+
+<file path=ppt/comments/comment1.xml><?xml version="1.0" encoding="utf-8"?>
+<p:cmLst xmlns:a="http://schemas.openxmlformats.org/drawingml/2006/main" xmlns:r="http://schemas.openxmlformats.org/officeDocument/2006/relationships" xmlns:p="http://schemas.openxmlformats.org/presentationml/2006/main">
+  <p:cm authorId="1" dt="2026-05-12T08:59:20.399" idx="1">
+    <p:pos x="4803" y="3090"/>
+    <p:text>Lets rework this to as Xceedance is not a carrier.</p:text>
+    <p:extLst>
+      <p:ext uri="{C676402C-5697-4E1C-873F-D02D1690AC5C}">
+        <p15:threadingInfo xmlns:p15="http://schemas.microsoft.com/office/powerpoint/2012/main" timeZoneBias="-60"/>
+      </p:ext>
+    </p:extLst>
+  </p:cm>
+</p:cmLst>
+</file>
+
+<file path=ppt/comments/comment2.xml><?xml version="1.0" encoding="utf-8"?>
+<p:cmLst xmlns:a="http://schemas.openxmlformats.org/drawingml/2006/main" xmlns:r="http://schemas.openxmlformats.org/officeDocument/2006/relationships" xmlns:p="http://schemas.openxmlformats.org/presentationml/2006/main">
+  <p:cm authorId="1" dt="2026-05-12T09:15:13.913" idx="2">
+    <p:pos x="3360" y="2119"/>
+    <p:text>Check reword to likely or often</p:text>
+    <p:extLst>
+      <p:ext uri="{C676402C-5697-4E1C-873F-D02D1690AC5C}">
+        <p15:threadingInfo xmlns:p15="http://schemas.microsoft.com/office/powerpoint/2012/main" timeZoneBias="-60"/>
+      </p:ext>
+    </p:extLst>
+  </p:cm>
+  <p:cm authorId="1" dt="2026-05-12T09:15:41.686" idx="3">
+    <p:pos x="3360" y="2215"/>
+    <p:text>Validate but yes very likely;y</p:text>
+    <p:extLst>
+      <p:ext uri="{C676402C-5697-4E1C-873F-D02D1690AC5C}">
+        <p15:threadingInfo xmlns:p15="http://schemas.microsoft.com/office/powerpoint/2012/main" timeZoneBias="-60">
+          <p15:parentCm authorId="1" idx="2"/>
+        </p15:threadingInfo>
+      </p:ext>
+    </p:extLst>
+  </p:cm>
+  <p:cm authorId="1" dt="2026-05-12T09:15:47.790" idx="4">
+    <p:pos x="3456" y="2565"/>
+    <p:text>Validate but yes very likely</p:text>
+    <p:extLst>
+      <p:ext uri="{C676402C-5697-4E1C-873F-D02D1690AC5C}">
+        <p15:threadingInfo xmlns:p15="http://schemas.microsoft.com/office/powerpoint/2012/main" timeZoneBias="-60"/>
+      </p:ext>
+    </p:extLst>
+  </p:cm>
+</p:cmLst>
 </file>
 
 <file path=ppt/notesMasters/notesMaster1.xml><?xml version="1.0" encoding="utf-8"?>
@@ -749,6 +809,7 @@
           <a:lstStyle/>
           <a:p>
             <a:r>
+              <a:rPr dirty="0"/>
               <a:t>Four pillars, deliberately simplified for this audience. The decisive message is the fourth pillar — Business Insights. This is what separates modern observability from traditional IT monitoring: we will instrument value streams such as Quote-to-Bind and FNOL-to-Settlement, so that for the first time we can connect a technical event to a business consequence in real time. The choice of an open standard is strategically important: it is what guarantees we are never trapped by a vendor's pricing model or product roadmap.</a:t>
             </a:r>
           </a:p>
@@ -1303,7 +1364,7 @@
           <a:p>
             <a:fld id="{5BCAD085-E8A6-8845-BD4E-CB4CCA059FC4}" type="datetimeFigureOut">
               <a:rPr lang="en-US" smtClean="0"/>
-              <a:t>5/11/2026</a:t>
+              <a:t>5/12/26</a:t>
             </a:fld>
             <a:endParaRPr lang="en-US"/>
           </a:p>
@@ -1471,7 +1532,7 @@
           <a:p>
             <a:fld id="{5BCAD085-E8A6-8845-BD4E-CB4CCA059FC4}" type="datetimeFigureOut">
               <a:rPr lang="en-US" smtClean="0"/>
-              <a:t>5/11/2026</a:t>
+              <a:t>5/12/26</a:t>
             </a:fld>
             <a:endParaRPr lang="en-US"/>
           </a:p>
@@ -1649,7 +1710,7 @@
           <a:p>
             <a:fld id="{5BCAD085-E8A6-8845-BD4E-CB4CCA059FC4}" type="datetimeFigureOut">
               <a:rPr lang="en-US" smtClean="0"/>
-              <a:t>5/11/2026</a:t>
+              <a:t>5/12/26</a:t>
             </a:fld>
             <a:endParaRPr lang="en-US"/>
           </a:p>
@@ -1817,7 +1878,7 @@
           <a:p>
             <a:fld id="{5BCAD085-E8A6-8845-BD4E-CB4CCA059FC4}" type="datetimeFigureOut">
               <a:rPr lang="en-US" smtClean="0"/>
-              <a:t>5/11/2026</a:t>
+              <a:t>5/12/26</a:t>
             </a:fld>
             <a:endParaRPr lang="en-US"/>
           </a:p>
@@ -2062,7 +2123,7 @@
           <a:p>
             <a:fld id="{5BCAD085-E8A6-8845-BD4E-CB4CCA059FC4}" type="datetimeFigureOut">
               <a:rPr lang="en-US" smtClean="0"/>
-              <a:t>5/11/2026</a:t>
+              <a:t>5/12/26</a:t>
             </a:fld>
             <a:endParaRPr lang="en-US"/>
           </a:p>
@@ -2347,7 +2408,7 @@
           <a:p>
             <a:fld id="{5BCAD085-E8A6-8845-BD4E-CB4CCA059FC4}" type="datetimeFigureOut">
               <a:rPr lang="en-US" smtClean="0"/>
-              <a:t>5/11/2026</a:t>
+              <a:t>5/12/26</a:t>
             </a:fld>
             <a:endParaRPr lang="en-US"/>
           </a:p>
@@ -2766,7 +2827,7 @@
           <a:p>
             <a:fld id="{5BCAD085-E8A6-8845-BD4E-CB4CCA059FC4}" type="datetimeFigureOut">
               <a:rPr lang="en-US" smtClean="0"/>
-              <a:t>5/11/2026</a:t>
+              <a:t>5/12/26</a:t>
             </a:fld>
             <a:endParaRPr lang="en-US"/>
           </a:p>
@@ -2883,7 +2944,7 @@
           <a:p>
             <a:fld id="{5BCAD085-E8A6-8845-BD4E-CB4CCA059FC4}" type="datetimeFigureOut">
               <a:rPr lang="en-US" smtClean="0"/>
-              <a:t>5/11/2026</a:t>
+              <a:t>5/12/26</a:t>
             </a:fld>
             <a:endParaRPr lang="en-US"/>
           </a:p>
@@ -2978,7 +3039,7 @@
           <a:p>
             <a:fld id="{5BCAD085-E8A6-8845-BD4E-CB4CCA059FC4}" type="datetimeFigureOut">
               <a:rPr lang="en-US" smtClean="0"/>
-              <a:t>5/11/2026</a:t>
+              <a:t>5/12/26</a:t>
             </a:fld>
             <a:endParaRPr lang="en-US"/>
           </a:p>
@@ -3253,7 +3314,7 @@
           <a:p>
             <a:fld id="{5BCAD085-E8A6-8845-BD4E-CB4CCA059FC4}" type="datetimeFigureOut">
               <a:rPr lang="en-US" smtClean="0"/>
-              <a:t>5/11/2026</a:t>
+              <a:t>5/12/26</a:t>
             </a:fld>
             <a:endParaRPr lang="en-US"/>
           </a:p>
@@ -3505,7 +3566,7 @@
           <a:p>
             <a:fld id="{5BCAD085-E8A6-8845-BD4E-CB4CCA059FC4}" type="datetimeFigureOut">
               <a:rPr lang="en-US" smtClean="0"/>
-              <a:t>5/11/2026</a:t>
+              <a:t>5/12/26</a:t>
             </a:fld>
             <a:endParaRPr lang="en-US"/>
           </a:p>
@@ -3716,7 +3777,7 @@
           <a:p>
             <a:fld id="{5BCAD085-E8A6-8845-BD4E-CB4CCA059FC4}" type="datetimeFigureOut">
               <a:rPr lang="en-US" smtClean="0"/>
-              <a:t>5/11/2026</a:t>
+              <a:t>5/12/26</a:t>
             </a:fld>
             <a:endParaRPr lang="en-US"/>
           </a:p>
@@ -4962,6 +5023,55 @@
                 <a:latin typeface="Segoe UI"/>
               </a:rPr>
               <a:t>10 / 12</a:t>
+            </a:r>
+          </a:p>
+        </p:txBody>
+      </p:sp>
+      <p:sp>
+        <p:nvSpPr>
+          <p:cNvPr id="12" name="Rectangle 11">
+            <a:extLst>
+              <a:ext uri="{FF2B5EF4-FFF2-40B4-BE49-F238E27FC236}">
+                <a16:creationId xmlns:a16="http://schemas.microsoft.com/office/drawing/2014/main" id="{92DFF6F6-1EC6-5702-EDC9-1D5187E50408}"/>
+              </a:ext>
+            </a:extLst>
+          </p:cNvPr>
+          <p:cNvSpPr/>
+          <p:nvPr/>
+        </p:nvSpPr>
+        <p:spPr>
+          <a:xfrm>
+            <a:off x="6313714" y="526697"/>
+            <a:ext cx="3407229" cy="1824617"/>
+          </a:xfrm>
+          <a:prstGeom prst="rect">
+            <a:avLst/>
+          </a:prstGeom>
+        </p:spPr>
+        <p:style>
+          <a:lnRef idx="2">
+            <a:schemeClr val="accent2">
+              <a:shade val="15000"/>
+            </a:schemeClr>
+          </a:lnRef>
+          <a:fillRef idx="1">
+            <a:schemeClr val="accent2"/>
+          </a:fillRef>
+          <a:effectRef idx="0">
+            <a:schemeClr val="accent2"/>
+          </a:effectRef>
+          <a:fontRef idx="minor">
+            <a:schemeClr val="lt1"/>
+          </a:fontRef>
+        </p:style>
+        <p:txBody>
+          <a:bodyPr rtlCol="0" anchor="ctr"/>
+          <a:lstStyle/>
+          <a:p>
+            <a:pPr algn="ctr"/>
+            <a:r>
+              <a:rPr lang="en-US" dirty="0"/>
+              <a:t>Appendix</a:t>
             </a:r>
           </a:p>
         </p:txBody>
@@ -5626,6 +5736,55 @@
           </a:p>
         </p:txBody>
       </p:sp>
+      <p:sp>
+        <p:nvSpPr>
+          <p:cNvPr id="11" name="Rectangle 10">
+            <a:extLst>
+              <a:ext uri="{FF2B5EF4-FFF2-40B4-BE49-F238E27FC236}">
+                <a16:creationId xmlns:a16="http://schemas.microsoft.com/office/drawing/2014/main" id="{FCD0AE70-5F5D-5153-3702-B6AB5805F571}"/>
+              </a:ext>
+            </a:extLst>
+          </p:cNvPr>
+          <p:cNvSpPr/>
+          <p:nvPr/>
+        </p:nvSpPr>
+        <p:spPr>
+          <a:xfrm>
+            <a:off x="6313714" y="526697"/>
+            <a:ext cx="3407229" cy="1824617"/>
+          </a:xfrm>
+          <a:prstGeom prst="rect">
+            <a:avLst/>
+          </a:prstGeom>
+        </p:spPr>
+        <p:style>
+          <a:lnRef idx="2">
+            <a:schemeClr val="accent2">
+              <a:shade val="15000"/>
+            </a:schemeClr>
+          </a:lnRef>
+          <a:fillRef idx="1">
+            <a:schemeClr val="accent2"/>
+          </a:fillRef>
+          <a:effectRef idx="0">
+            <a:schemeClr val="accent2"/>
+          </a:effectRef>
+          <a:fontRef idx="minor">
+            <a:schemeClr val="lt1"/>
+          </a:fontRef>
+        </p:style>
+        <p:txBody>
+          <a:bodyPr rtlCol="0" anchor="ctr"/>
+          <a:lstStyle/>
+          <a:p>
+            <a:pPr algn="ctr"/>
+            <a:r>
+              <a:rPr lang="en-US" dirty="0"/>
+              <a:t>Appendix</a:t>
+            </a:r>
+          </a:p>
+        </p:txBody>
+      </p:sp>
     </p:spTree>
   </p:cSld>
   <p:clrMapOvr>
@@ -6502,6 +6661,55 @@
           </a:p>
         </p:txBody>
       </p:sp>
+      <p:sp>
+        <p:nvSpPr>
+          <p:cNvPr id="6" name="Rectangle 5">
+            <a:extLst>
+              <a:ext uri="{FF2B5EF4-FFF2-40B4-BE49-F238E27FC236}">
+                <a16:creationId xmlns:a16="http://schemas.microsoft.com/office/drawing/2014/main" id="{BAFDB9F7-D0AA-6D57-1BE7-ED2DD38742D5}"/>
+              </a:ext>
+            </a:extLst>
+          </p:cNvPr>
+          <p:cNvSpPr/>
+          <p:nvPr/>
+        </p:nvSpPr>
+        <p:spPr>
+          <a:xfrm>
+            <a:off x="-544286" y="526697"/>
+            <a:ext cx="10265229" cy="5276088"/>
+          </a:xfrm>
+          <a:prstGeom prst="rect">
+            <a:avLst/>
+          </a:prstGeom>
+        </p:spPr>
+        <p:style>
+          <a:lnRef idx="2">
+            <a:schemeClr val="accent2">
+              <a:shade val="15000"/>
+            </a:schemeClr>
+          </a:lnRef>
+          <a:fillRef idx="1">
+            <a:schemeClr val="accent2"/>
+          </a:fillRef>
+          <a:effectRef idx="0">
+            <a:schemeClr val="accent2"/>
+          </a:effectRef>
+          <a:fontRef idx="minor">
+            <a:schemeClr val="lt1"/>
+          </a:fontRef>
+        </p:style>
+        <p:txBody>
+          <a:bodyPr rtlCol="0" anchor="ctr"/>
+          <a:lstStyle/>
+          <a:p>
+            <a:pPr algn="ctr"/>
+            <a:r>
+              <a:rPr lang="en-US" dirty="0"/>
+              <a:t>Remove</a:t>
+            </a:r>
+          </a:p>
+        </p:txBody>
+      </p:sp>
     </p:spTree>
   </p:cSld>
   <p:clrMapOvr>
@@ -7040,6 +7248,55 @@
                 <a:latin typeface="Segoe UI"/>
               </a:rPr>
               <a:t>2 / 12</a:t>
+            </a:r>
+          </a:p>
+        </p:txBody>
+      </p:sp>
+      <p:sp>
+        <p:nvSpPr>
+          <p:cNvPr id="10" name="Rectangle 9">
+            <a:extLst>
+              <a:ext uri="{FF2B5EF4-FFF2-40B4-BE49-F238E27FC236}">
+                <a16:creationId xmlns:a16="http://schemas.microsoft.com/office/drawing/2014/main" id="{50EA0D9B-7215-5EDF-88F7-67E4519C81FF}"/>
+              </a:ext>
+            </a:extLst>
+          </p:cNvPr>
+          <p:cNvSpPr/>
+          <p:nvPr/>
+        </p:nvSpPr>
+        <p:spPr>
+          <a:xfrm>
+            <a:off x="6313714" y="526697"/>
+            <a:ext cx="3407229" cy="1824617"/>
+          </a:xfrm>
+          <a:prstGeom prst="rect">
+            <a:avLst/>
+          </a:prstGeom>
+        </p:spPr>
+        <p:style>
+          <a:lnRef idx="2">
+            <a:schemeClr val="accent3">
+              <a:shade val="15000"/>
+            </a:schemeClr>
+          </a:lnRef>
+          <a:fillRef idx="1">
+            <a:schemeClr val="accent3"/>
+          </a:fillRef>
+          <a:effectRef idx="0">
+            <a:schemeClr val="accent3"/>
+          </a:effectRef>
+          <a:fontRef idx="minor">
+            <a:schemeClr val="lt1"/>
+          </a:fontRef>
+        </p:style>
+        <p:txBody>
+          <a:bodyPr rtlCol="0" anchor="ctr"/>
+          <a:lstStyle/>
+          <a:p>
+            <a:pPr algn="ctr"/>
+            <a:r>
+              <a:rPr lang="en-US" dirty="0"/>
+              <a:t>Keep</a:t>
             </a:r>
           </a:p>
         </p:txBody>
@@ -7405,7 +7662,7 @@
                     <a:p>
                       <a:pPr algn="l"/>
                       <a:r>
-                        <a:rPr sz="1500" b="0">
+                        <a:rPr sz="1500" b="0" dirty="0">
                           <a:solidFill>
                             <a:srgbClr val="1F1F1F"/>
                           </a:solidFill>
@@ -7481,7 +7738,7 @@
                     <a:p>
                       <a:pPr algn="l"/>
                       <a:r>
-                        <a:rPr sz="1500" b="0">
+                        <a:rPr sz="1500" b="0" dirty="0">
                           <a:solidFill>
                             <a:srgbClr val="1F1F1F"/>
                           </a:solidFill>
@@ -7557,7 +7814,7 @@
                     <a:p>
                       <a:pPr algn="l"/>
                       <a:r>
-                        <a:rPr sz="1500" b="0">
+                        <a:rPr sz="1500" b="0" dirty="0">
                           <a:solidFill>
                             <a:srgbClr val="1F1F1F"/>
                           </a:solidFill>
@@ -7686,7 +7943,7 @@
                     <a:p>
                       <a:pPr algn="l"/>
                       <a:r>
-                        <a:rPr sz="1500" b="0">
+                        <a:rPr sz="1500" b="0" dirty="0">
                           <a:solidFill>
                             <a:srgbClr val="1F1F1F"/>
                           </a:solidFill>
@@ -7849,6 +8106,59 @@
           </a:p>
         </p:txBody>
       </p:sp>
+      <p:sp>
+        <p:nvSpPr>
+          <p:cNvPr id="10" name="Rectangle 9">
+            <a:extLst>
+              <a:ext uri="{FF2B5EF4-FFF2-40B4-BE49-F238E27FC236}">
+                <a16:creationId xmlns:a16="http://schemas.microsoft.com/office/drawing/2014/main" id="{25E9CE74-452D-4A54-2D34-41CEC1BF362C}"/>
+              </a:ext>
+            </a:extLst>
+          </p:cNvPr>
+          <p:cNvSpPr/>
+          <p:nvPr/>
+        </p:nvSpPr>
+        <p:spPr>
+          <a:xfrm>
+            <a:off x="6313714" y="526697"/>
+            <a:ext cx="3407229" cy="1824617"/>
+          </a:xfrm>
+          <a:prstGeom prst="rect">
+            <a:avLst/>
+          </a:prstGeom>
+        </p:spPr>
+        <p:style>
+          <a:lnRef idx="2">
+            <a:schemeClr val="accent3">
+              <a:shade val="15000"/>
+            </a:schemeClr>
+          </a:lnRef>
+          <a:fillRef idx="1">
+            <a:schemeClr val="accent3"/>
+          </a:fillRef>
+          <a:effectRef idx="0">
+            <a:schemeClr val="accent3"/>
+          </a:effectRef>
+          <a:fontRef idx="minor">
+            <a:schemeClr val="lt1"/>
+          </a:fontRef>
+        </p:style>
+        <p:txBody>
+          <a:bodyPr rtlCol="0" anchor="ctr"/>
+          <a:lstStyle/>
+          <a:p>
+            <a:pPr algn="ctr"/>
+            <a:r>
+              <a:rPr lang="en-US" dirty="0">
+                <a:solidFill>
+                  <a:schemeClr val="lt1"/>
+                </a:solidFill>
+              </a:rPr>
+              <a:t>Keep</a:t>
+            </a:r>
+          </a:p>
+        </p:txBody>
+      </p:sp>
     </p:spTree>
   </p:cSld>
   <p:clrMapOvr>
@@ -7977,7 +8287,7 @@
           <a:p>
             <a:pPr algn="l"/>
             <a:r>
-              <a:rPr sz="3200" b="1">
+              <a:rPr sz="3200" b="1" dirty="0">
                 <a:solidFill>
                   <a:srgbClr val="0B3D91"/>
                 </a:solidFill>
@@ -8627,7 +8937,7 @@
           <a:p>
             <a:pPr algn="ctr"/>
             <a:r>
-              <a:rPr sz="1800" b="1">
+              <a:rPr lang="en-US" sz="1800" b="1" dirty="0">
                 <a:solidFill>
                   <a:srgbClr val="FFFFFF"/>
                 </a:solidFill>
@@ -8635,6 +8945,12 @@
               </a:rPr>
               <a:t>Business Insights</a:t>
             </a:r>
+            <a:endParaRPr sz="1800" b="1" dirty="0">
+              <a:solidFill>
+                <a:srgbClr val="FFFFFF"/>
+              </a:solidFill>
+              <a:latin typeface="Segoe UI"/>
+            </a:endParaRPr>
           </a:p>
         </p:txBody>
       </p:sp>
@@ -8943,6 +9259,55 @@
                 <a:latin typeface="Segoe UI"/>
               </a:rPr>
               <a:t>4 / 12</a:t>
+            </a:r>
+          </a:p>
+        </p:txBody>
+      </p:sp>
+      <p:sp>
+        <p:nvSpPr>
+          <p:cNvPr id="29" name="Rectangle 28">
+            <a:extLst>
+              <a:ext uri="{FF2B5EF4-FFF2-40B4-BE49-F238E27FC236}">
+                <a16:creationId xmlns:a16="http://schemas.microsoft.com/office/drawing/2014/main" id="{6C3C3995-DF44-271E-9A58-8FE661419B50}"/>
+              </a:ext>
+            </a:extLst>
+          </p:cNvPr>
+          <p:cNvSpPr/>
+          <p:nvPr/>
+        </p:nvSpPr>
+        <p:spPr>
+          <a:xfrm>
+            <a:off x="6313714" y="526697"/>
+            <a:ext cx="3407229" cy="1824617"/>
+          </a:xfrm>
+          <a:prstGeom prst="rect">
+            <a:avLst/>
+          </a:prstGeom>
+        </p:spPr>
+        <p:style>
+          <a:lnRef idx="2">
+            <a:schemeClr val="accent2">
+              <a:shade val="15000"/>
+            </a:schemeClr>
+          </a:lnRef>
+          <a:fillRef idx="1">
+            <a:schemeClr val="accent2"/>
+          </a:fillRef>
+          <a:effectRef idx="0">
+            <a:schemeClr val="accent2"/>
+          </a:effectRef>
+          <a:fontRef idx="minor">
+            <a:schemeClr val="lt1"/>
+          </a:fontRef>
+        </p:style>
+        <p:txBody>
+          <a:bodyPr rtlCol="0" anchor="ctr"/>
+          <a:lstStyle/>
+          <a:p>
+            <a:pPr algn="ctr"/>
+            <a:r>
+              <a:rPr lang="en-US" dirty="0"/>
+              <a:t>Appendix</a:t>
             </a:r>
           </a:p>
         </p:txBody>
@@ -9414,6 +9779,59 @@
                 <a:latin typeface="Segoe UI"/>
               </a:rPr>
               <a:t>5 / 12</a:t>
+            </a:r>
+          </a:p>
+        </p:txBody>
+      </p:sp>
+      <p:sp>
+        <p:nvSpPr>
+          <p:cNvPr id="10" name="Rectangle 9">
+            <a:extLst>
+              <a:ext uri="{FF2B5EF4-FFF2-40B4-BE49-F238E27FC236}">
+                <a16:creationId xmlns:a16="http://schemas.microsoft.com/office/drawing/2014/main" id="{94EE4A79-7A1C-504E-2467-991D22617D61}"/>
+              </a:ext>
+            </a:extLst>
+          </p:cNvPr>
+          <p:cNvSpPr/>
+          <p:nvPr/>
+        </p:nvSpPr>
+        <p:spPr>
+          <a:xfrm>
+            <a:off x="6313714" y="526697"/>
+            <a:ext cx="3407229" cy="1824617"/>
+          </a:xfrm>
+          <a:prstGeom prst="rect">
+            <a:avLst/>
+          </a:prstGeom>
+        </p:spPr>
+        <p:style>
+          <a:lnRef idx="2">
+            <a:schemeClr val="accent3">
+              <a:shade val="15000"/>
+            </a:schemeClr>
+          </a:lnRef>
+          <a:fillRef idx="1">
+            <a:schemeClr val="accent3"/>
+          </a:fillRef>
+          <a:effectRef idx="0">
+            <a:schemeClr val="accent3"/>
+          </a:effectRef>
+          <a:fontRef idx="minor">
+            <a:schemeClr val="lt1"/>
+          </a:fontRef>
+        </p:style>
+        <p:txBody>
+          <a:bodyPr rtlCol="0" anchor="ctr"/>
+          <a:lstStyle/>
+          <a:p>
+            <a:pPr algn="ctr"/>
+            <a:r>
+              <a:rPr lang="en-US" dirty="0">
+                <a:solidFill>
+                  <a:schemeClr val="lt1"/>
+                </a:solidFill>
+              </a:rPr>
+              <a:t>Keep</a:t>
             </a:r>
           </a:p>
         </p:txBody>
@@ -9726,7 +10144,7 @@
                     <a:p>
                       <a:pPr algn="l"/>
                       <a:r>
-                        <a:rPr sz="1600" b="0">
+                        <a:rPr sz="1600" b="0" dirty="0">
                           <a:solidFill>
                             <a:srgbClr val="1F1F1F"/>
                           </a:solidFill>
@@ -10078,6 +10496,74 @@
           </a:p>
         </p:txBody>
       </p:sp>
+      <p:sp>
+        <p:nvSpPr>
+          <p:cNvPr id="10" name="Rectangle 9">
+            <a:extLst>
+              <a:ext uri="{FF2B5EF4-FFF2-40B4-BE49-F238E27FC236}">
+                <a16:creationId xmlns:a16="http://schemas.microsoft.com/office/drawing/2014/main" id="{5B2A962E-EDED-5A26-D7F0-22DBE8B73021}"/>
+              </a:ext>
+            </a:extLst>
+          </p:cNvPr>
+          <p:cNvSpPr/>
+          <p:nvPr/>
+        </p:nvSpPr>
+        <p:spPr>
+          <a:xfrm>
+            <a:off x="2090058" y="526697"/>
+            <a:ext cx="7630886" cy="3588103"/>
+          </a:xfrm>
+          <a:prstGeom prst="rect">
+            <a:avLst/>
+          </a:prstGeom>
+        </p:spPr>
+        <p:style>
+          <a:lnRef idx="2">
+            <a:schemeClr val="accent2">
+              <a:shade val="15000"/>
+            </a:schemeClr>
+          </a:lnRef>
+          <a:fillRef idx="1">
+            <a:schemeClr val="accent2"/>
+          </a:fillRef>
+          <a:effectRef idx="0">
+            <a:schemeClr val="accent2"/>
+          </a:effectRef>
+          <a:fontRef idx="minor">
+            <a:schemeClr val="lt1"/>
+          </a:fontRef>
+        </p:style>
+        <p:txBody>
+          <a:bodyPr rtlCol="0" anchor="ctr"/>
+          <a:lstStyle/>
+          <a:p>
+            <a:pPr algn="ctr"/>
+            <a:r>
+              <a:rPr lang="en-US" dirty="0">
+                <a:solidFill>
+                  <a:schemeClr val="lt1"/>
+                </a:solidFill>
+              </a:rPr>
+              <a:t>This read like were an insurer which we are not</a:t>
+            </a:r>
+          </a:p>
+          <a:p>
+            <a:pPr algn="ctr"/>
+            <a:endParaRPr lang="en-US" dirty="0"/>
+          </a:p>
+          <a:p>
+            <a:pPr algn="ctr"/>
+            <a:r>
+              <a:rPr lang="en-US" dirty="0">
+                <a:solidFill>
+                  <a:schemeClr val="lt1"/>
+                </a:solidFill>
+              </a:rPr>
+              <a:t>Needs total rethink or removal</a:t>
+            </a:r>
+          </a:p>
+        </p:txBody>
+      </p:sp>
     </p:spTree>
   </p:cSld>
   <p:clrMapOvr>
@@ -10546,6 +11032,119 @@
               </a:rPr>
               <a:t>7 / 12</a:t>
             </a:r>
+          </a:p>
+        </p:txBody>
+      </p:sp>
+      <p:sp>
+        <p:nvSpPr>
+          <p:cNvPr id="10" name="Rectangle 9">
+            <a:extLst>
+              <a:ext uri="{FF2B5EF4-FFF2-40B4-BE49-F238E27FC236}">
+                <a16:creationId xmlns:a16="http://schemas.microsoft.com/office/drawing/2014/main" id="{8D690970-5E95-839B-673D-D33AA7D8B8EA}"/>
+              </a:ext>
+            </a:extLst>
+          </p:cNvPr>
+          <p:cNvSpPr/>
+          <p:nvPr/>
+        </p:nvSpPr>
+        <p:spPr>
+          <a:xfrm>
+            <a:off x="1554480" y="-242705"/>
+            <a:ext cx="10757264" cy="2550476"/>
+          </a:xfrm>
+          <a:prstGeom prst="rect">
+            <a:avLst/>
+          </a:prstGeom>
+        </p:spPr>
+        <p:style>
+          <a:lnRef idx="2">
+            <a:schemeClr val="accent3">
+              <a:shade val="15000"/>
+            </a:schemeClr>
+          </a:lnRef>
+          <a:fillRef idx="1">
+            <a:schemeClr val="accent3"/>
+          </a:fillRef>
+          <a:effectRef idx="0">
+            <a:schemeClr val="accent3"/>
+          </a:effectRef>
+          <a:fontRef idx="minor">
+            <a:schemeClr val="lt1"/>
+          </a:fontRef>
+        </p:style>
+        <p:txBody>
+          <a:bodyPr rtlCol="0" anchor="ctr"/>
+          <a:lstStyle/>
+          <a:p>
+            <a:pPr algn="ctr"/>
+            <a:r>
+              <a:rPr lang="en-US" dirty="0">
+                <a:solidFill>
+                  <a:schemeClr val="lt1"/>
+                </a:solidFill>
+              </a:rPr>
+              <a:t>KEEP AND:</a:t>
+            </a:r>
+            <a:br>
+              <a:rPr lang="en-US" dirty="0">
+                <a:solidFill>
+                  <a:schemeClr val="lt1"/>
+                </a:solidFill>
+              </a:rPr>
+            </a:br>
+            <a:br>
+              <a:rPr lang="en-US" dirty="0">
+                <a:solidFill>
+                  <a:schemeClr val="lt1"/>
+                </a:solidFill>
+              </a:rPr>
+            </a:br>
+            <a:r>
+              <a:rPr lang="en-US" b="1" dirty="0">
+                <a:solidFill>
+                  <a:schemeClr val="lt1"/>
+                </a:solidFill>
+              </a:rPr>
+              <a:t>TALENT</a:t>
+            </a:r>
+            <a:r>
+              <a:rPr lang="en-US" dirty="0">
+                <a:solidFill>
+                  <a:schemeClr val="lt1"/>
+                </a:solidFill>
+              </a:rPr>
+              <a:t>:  reword to articulate that we have a team of engineers already building application, logging and a team of engineers starting to do observability in infrastructure we need to articulate that we need to bring these together in one holistic side of activities.</a:t>
+            </a:r>
+            <a:br>
+              <a:rPr lang="en-US" dirty="0">
+                <a:solidFill>
+                  <a:schemeClr val="lt1"/>
+                </a:solidFill>
+              </a:rPr>
+            </a:br>
+            <a:r>
+              <a:rPr lang="en-US" b="1" dirty="0">
+                <a:solidFill>
+                  <a:schemeClr val="lt1"/>
+                </a:solidFill>
+              </a:rPr>
+              <a:t>Cost Discipline:</a:t>
+            </a:r>
+          </a:p>
+          <a:p>
+            <a:pPr algn="ctr"/>
+            <a:r>
+              <a:rPr lang="en-US" dirty="0"/>
+              <a:t>Add a few lines here to state that we have no Fin ops capability and should define and standardized as soon as possible</a:t>
+            </a:r>
+            <a:br>
+              <a:rPr lang="en-US" dirty="0"/>
+            </a:br>
+            <a:endParaRPr lang="en-US" dirty="0">
+              <a:solidFill>
+                <a:schemeClr val="lt1"/>
+              </a:solidFill>
+            </a:endParaRPr>
           </a:p>
         </p:txBody>
       </p:sp>
@@ -10963,7 +11562,7 @@
                     <a:p>
                       <a:pPr algn="l"/>
                       <a:r>
-                        <a:rPr sz="1600" b="0">
+                        <a:rPr sz="1600" b="0" dirty="0">
                           <a:solidFill>
                             <a:srgbClr val="1F1F1F"/>
                           </a:solidFill>
@@ -11327,6 +11926,89 @@
           </a:p>
         </p:txBody>
       </p:sp>
+      <p:sp>
+        <p:nvSpPr>
+          <p:cNvPr id="13" name="Rectangle 12">
+            <a:extLst>
+              <a:ext uri="{FF2B5EF4-FFF2-40B4-BE49-F238E27FC236}">
+                <a16:creationId xmlns:a16="http://schemas.microsoft.com/office/drawing/2014/main" id="{C4AFEBFB-C563-74E1-1C63-E105A6BA376F}"/>
+              </a:ext>
+            </a:extLst>
+          </p:cNvPr>
+          <p:cNvSpPr/>
+          <p:nvPr/>
+        </p:nvSpPr>
+        <p:spPr>
+          <a:xfrm>
+            <a:off x="1665515" y="-322549"/>
+            <a:ext cx="9013372" cy="2003842"/>
+          </a:xfrm>
+          <a:prstGeom prst="rect">
+            <a:avLst/>
+          </a:prstGeom>
+        </p:spPr>
+        <p:style>
+          <a:lnRef idx="2">
+            <a:schemeClr val="accent3">
+              <a:shade val="15000"/>
+            </a:schemeClr>
+          </a:lnRef>
+          <a:fillRef idx="1">
+            <a:schemeClr val="accent3"/>
+          </a:fillRef>
+          <a:effectRef idx="0">
+            <a:schemeClr val="accent3"/>
+          </a:effectRef>
+          <a:fontRef idx="minor">
+            <a:schemeClr val="lt1"/>
+          </a:fontRef>
+        </p:style>
+        <p:txBody>
+          <a:bodyPr rtlCol="0" anchor="ctr"/>
+          <a:lstStyle/>
+          <a:p>
+            <a:pPr algn="ctr"/>
+            <a:r>
+              <a:rPr lang="en-US" dirty="0">
+                <a:solidFill>
+                  <a:schemeClr val="lt1"/>
+                </a:solidFill>
+              </a:rPr>
+              <a:t>Keep But change/ add.</a:t>
+            </a:r>
+          </a:p>
+          <a:p>
+            <a:pPr algn="ctr"/>
+            <a:endParaRPr lang="en-US" dirty="0"/>
+          </a:p>
+          <a:p>
+            <a:pPr algn="ctr"/>
+            <a:r>
+              <a:rPr lang="en-US" dirty="0">
+                <a:solidFill>
+                  <a:schemeClr val="lt1"/>
+                </a:solidFill>
+              </a:rPr>
+              <a:t>Refocus this page to bring in the point that as part of Ian core, etc. there’s already an effort to do observability in a proper method. We are bringing strategy and consistent approach to that method, as well as joining out the infrastructure, logging and monitoring with the application.</a:t>
+            </a:r>
+            <a:br>
+              <a:rPr lang="en-US" dirty="0">
+                <a:solidFill>
+                  <a:schemeClr val="lt1"/>
+                </a:solidFill>
+              </a:rPr>
+            </a:br>
+            <a:r>
+              <a:rPr lang="en-US" dirty="0">
+                <a:solidFill>
+                  <a:schemeClr val="lt1"/>
+                </a:solidFill>
+              </a:rPr>
+              <a:t>We should also note that there is a quality team, and that should bring SRE as part of this which will be relying upon due to observability.</a:t>
+            </a:r>
+          </a:p>
+        </p:txBody>
+      </p:sp>
     </p:spTree>
   </p:cSld>
   <p:clrMapOvr>
@@ -11804,6 +12486,85 @@
               </a:rPr>
               <a:t>9 / 12</a:t>
             </a:r>
+          </a:p>
+        </p:txBody>
+      </p:sp>
+      <p:sp>
+        <p:nvSpPr>
+          <p:cNvPr id="10" name="Rectangle 9">
+            <a:extLst>
+              <a:ext uri="{FF2B5EF4-FFF2-40B4-BE49-F238E27FC236}">
+                <a16:creationId xmlns:a16="http://schemas.microsoft.com/office/drawing/2014/main" id="{7E9FC3E1-006C-DC59-4929-87B0EFF5A8B6}"/>
+              </a:ext>
+            </a:extLst>
+          </p:cNvPr>
+          <p:cNvSpPr/>
+          <p:nvPr/>
+        </p:nvSpPr>
+        <p:spPr>
+          <a:xfrm>
+            <a:off x="1665515" y="-322549"/>
+            <a:ext cx="9013372" cy="2003842"/>
+          </a:xfrm>
+          <a:prstGeom prst="rect">
+            <a:avLst/>
+          </a:prstGeom>
+        </p:spPr>
+        <p:style>
+          <a:lnRef idx="2">
+            <a:schemeClr val="accent3">
+              <a:shade val="15000"/>
+            </a:schemeClr>
+          </a:lnRef>
+          <a:fillRef idx="1">
+            <a:schemeClr val="accent3"/>
+          </a:fillRef>
+          <a:effectRef idx="0">
+            <a:schemeClr val="accent3"/>
+          </a:effectRef>
+          <a:fontRef idx="minor">
+            <a:schemeClr val="lt1"/>
+          </a:fontRef>
+        </p:style>
+        <p:txBody>
+          <a:bodyPr rtlCol="0" anchor="ctr"/>
+          <a:lstStyle/>
+          <a:p>
+            <a:pPr algn="ctr"/>
+            <a:r>
+              <a:rPr lang="en-US" dirty="0">
+                <a:solidFill>
+                  <a:schemeClr val="lt1"/>
+                </a:solidFill>
+              </a:rPr>
+              <a:t>Keep But change/ add.</a:t>
+            </a:r>
+            <a:br>
+              <a:rPr lang="en-US" dirty="0">
+                <a:solidFill>
+                  <a:schemeClr val="lt1"/>
+                </a:solidFill>
+              </a:rPr>
+            </a:br>
+            <a:br>
+              <a:rPr lang="en-US" dirty="0">
+                <a:solidFill>
+                  <a:schemeClr val="lt1"/>
+                </a:solidFill>
+              </a:rPr>
+            </a:br>
+            <a:r>
+              <a:rPr lang="en-US" dirty="0">
+                <a:solidFill>
+                  <a:schemeClr val="lt1"/>
+                </a:solidFill>
+              </a:rPr>
+              <a:t>We don’t need regurgitation of government from an architecture standpoint what we should highlight here is COE have responsibility for setting standards and the product group of responsibilities for implementing the standards availability and many other aspects of engineering.</a:t>
+            </a:r>
+          </a:p>
+          <a:p>
+            <a:pPr algn="ctr"/>
+            <a:endParaRPr lang="en-US" dirty="0"/>
           </a:p>
         </p:txBody>
       </p:sp>
